--- a/docs/办公室对象检测系统.pptx
+++ b/docs/办公室对象检测系统.pptx
@@ -19054,7 +19054,7 @@
                   <a:latin typeface="微软雅黑 Light" panose="020B0502040204020203" pitchFamily="34" charset="-122"/>
                   <a:ea typeface="微软雅黑 Light" panose="020B0502040204020203" pitchFamily="34" charset="-122"/>
                 </a:rPr>
-                <a:t>多模块混合检测</a:t>
+                <a:t>多模型混合检测</a:t>
               </a:r>
               <a:r>
                 <a:rPr lang="en-US" altLang="zh-CN" sz="1300" dirty="0">
@@ -19080,7 +19080,7 @@
                   <a:latin typeface="微软雅黑 Light" panose="020B0502040204020203" pitchFamily="34" charset="-122"/>
                   <a:ea typeface="微软雅黑 Light" panose="020B0502040204020203" pitchFamily="34" charset="-122"/>
                 </a:rPr>
-                <a:t>选择单模块识别</a:t>
+                <a:t>选择单模块识别模块</a:t>
               </a:r>
               <a:endParaRPr lang="en-US" altLang="zh-CN" sz="1300" dirty="0">
                 <a:solidFill>
@@ -19158,6 +19158,29 @@
                 </a:rPr>
                 <a:t>+</a:t>
               </a:r>
+              <a:r>
+                <a:rPr lang="zh-CN" altLang="en-US" sz="1300" dirty="0">
+                  <a:solidFill>
+                    <a:schemeClr val="tx1">
+                      <a:lumMod val="75000"/>
+                      <a:lumOff val="25000"/>
+                    </a:schemeClr>
+                  </a:solidFill>
+                  <a:latin typeface="微软雅黑 Light" panose="020B0502040204020203" pitchFamily="34" charset="-122"/>
+                  <a:ea typeface="微软雅黑 Light" panose="020B0502040204020203" pitchFamily="34" charset="-122"/>
+                </a:rPr>
+                <a:t>历史记录和个人记录</a:t>
+              </a:r>
+              <a:endParaRPr lang="en-US" altLang="zh-CN" sz="1300" dirty="0">
+                <a:solidFill>
+                  <a:schemeClr val="tx1">
+                    <a:lumMod val="75000"/>
+                    <a:lumOff val="25000"/>
+                  </a:schemeClr>
+                </a:solidFill>
+                <a:latin typeface="微软雅黑 Light" panose="020B0502040204020203" pitchFamily="34" charset="-122"/>
+                <a:ea typeface="微软雅黑 Light" panose="020B0502040204020203" pitchFamily="34" charset="-122"/>
+              </a:endParaRPr>
             </a:p>
             <a:p>
               <a:pPr>
@@ -19224,6 +19247,29 @@
                 </a:rPr>
                 <a:t>+</a:t>
               </a:r>
+              <a:r>
+                <a:rPr lang="zh-CN" altLang="en-US" sz="1300" dirty="0">
+                  <a:solidFill>
+                    <a:schemeClr val="tx1">
+                      <a:lumMod val="75000"/>
+                      <a:lumOff val="25000"/>
+                    </a:schemeClr>
+                  </a:solidFill>
+                  <a:latin typeface="微软雅黑 Light" panose="020B0502040204020203" pitchFamily="34" charset="-122"/>
+                  <a:ea typeface="微软雅黑 Light" panose="020B0502040204020203" pitchFamily="34" charset="-122"/>
+                </a:rPr>
+                <a:t>登陆注册模块</a:t>
+              </a:r>
+              <a:endParaRPr lang="en-US" altLang="zh-CN" sz="1300" dirty="0">
+                <a:solidFill>
+                  <a:schemeClr val="tx1">
+                    <a:lumMod val="75000"/>
+                    <a:lumOff val="25000"/>
+                  </a:schemeClr>
+                </a:solidFill>
+                <a:latin typeface="微软雅黑 Light" panose="020B0502040204020203" pitchFamily="34" charset="-122"/>
+                <a:ea typeface="微软雅黑 Light" panose="020B0502040204020203" pitchFamily="34" charset="-122"/>
+              </a:endParaRPr>
             </a:p>
           </p:txBody>
         </p:sp>
@@ -25758,7 +25804,7 @@
           <p:spPr>
             <a:xfrm>
               <a:off x="5235617" y="3163936"/>
-              <a:ext cx="3804212" cy="725557"/>
+              <a:ext cx="3804212" cy="270074"/>
             </a:xfrm>
             <a:prstGeom prst="rect">
               <a:avLst/>
@@ -25795,19 +25841,16 @@
                   <a:spcPct val="200000"/>
                 </a:lnSpc>
               </a:pPr>
-              <a:r>
-                <a:rPr lang="en-US" altLang="zh-CN" sz="900" b="0" dirty="0">
-                  <a:solidFill>
-                    <a:schemeClr val="tx1">
-                      <a:lumMod val="75000"/>
-                      <a:lumOff val="25000"/>
-                    </a:schemeClr>
-                  </a:solidFill>
-                  <a:latin typeface="微软雅黑 Light" panose="020B0502040204020203" pitchFamily="34" charset="-122"/>
-                  <a:ea typeface="微软雅黑 Light" panose="020B0502040204020203" pitchFamily="34" charset="-122"/>
-                </a:rPr>
-                <a:t>A company is an association or collection of individuals, whether natural persons, legal persons, or a mixture of both. A company is an  association or collection of individuals, whether natural persons, legal persons</a:t>
-              </a:r>
+              <a:endParaRPr lang="en-US" altLang="zh-CN" sz="900" b="0" dirty="0">
+                <a:solidFill>
+                  <a:schemeClr val="tx1">
+                    <a:lumMod val="75000"/>
+                    <a:lumOff val="25000"/>
+                  </a:schemeClr>
+                </a:solidFill>
+                <a:latin typeface="微软雅黑 Light" panose="020B0502040204020203" pitchFamily="34" charset="-122"/>
+                <a:ea typeface="微软雅黑 Light" panose="020B0502040204020203" pitchFamily="34" charset="-122"/>
+              </a:endParaRPr>
             </a:p>
           </p:txBody>
         </p:sp>
@@ -25879,19 +25922,6 @@
           <a:p>
             <a:pPr algn="l"/>
             <a:r>
-              <a:rPr lang="en-US" altLang="zh-CN" sz="4000" b="1" dirty="0">
-                <a:solidFill>
-                  <a:schemeClr val="tx1">
-                    <a:lumMod val="75000"/>
-                    <a:lumOff val="25000"/>
-                  </a:schemeClr>
-                </a:solidFill>
-                <a:latin typeface="微软雅黑" panose="020B0503020204020204" pitchFamily="34" charset="-122"/>
-                <a:ea typeface="微软雅黑" panose="020B0503020204020204" pitchFamily="34" charset="-122"/>
-              </a:rPr>
-              <a:t>40</a:t>
-            </a:r>
-            <a:r>
               <a:rPr lang="zh-CN" altLang="en-US" sz="4000" b="1" dirty="0">
                 <a:solidFill>
                   <a:schemeClr val="tx1">
@@ -25902,7 +25932,7 @@
                 <a:latin typeface="微软雅黑" panose="020B0503020204020204" pitchFamily="34" charset="-122"/>
                 <a:ea typeface="微软雅黑" panose="020B0503020204020204" pitchFamily="34" charset="-122"/>
               </a:rPr>
-              <a:t>号字标题</a:t>
+              <a:t>模块设计</a:t>
             </a:r>
           </a:p>
         </p:txBody>

--- a/docs/办公室对象检测系统.pptx
+++ b/docs/办公室对象检测系统.pptx
@@ -15,15 +15,18 @@
     <p:sldId id="261" r:id="rId9"/>
     <p:sldId id="268" r:id="rId10"/>
     <p:sldId id="267" r:id="rId11"/>
-    <p:sldId id="258" r:id="rId12"/>
-    <p:sldId id="270" r:id="rId13"/>
-    <p:sldId id="269" r:id="rId14"/>
-    <p:sldId id="262" r:id="rId15"/>
+    <p:sldId id="273" r:id="rId12"/>
+    <p:sldId id="271" r:id="rId13"/>
+    <p:sldId id="272" r:id="rId14"/>
+    <p:sldId id="258" r:id="rId15"/>
+    <p:sldId id="270" r:id="rId16"/>
+    <p:sldId id="269" r:id="rId17"/>
+    <p:sldId id="262" r:id="rId18"/>
   </p:sldIdLst>
   <p:sldSz cx="12192000" cy="6858000"/>
   <p:notesSz cx="6858000" cy="9144000"/>
   <p:custDataLst>
-    <p:tags r:id="rId16"/>
+    <p:tags r:id="rId19"/>
   </p:custDataLst>
   <p:defaultTextStyle>
     <a:defPPr>
@@ -4395,8 +4398,8 @@
           </p:nvSpPr>
           <p:spPr>
             <a:xfrm>
-              <a:off x="3361664" y="4656058"/>
-              <a:ext cx="1274894" cy="294274"/>
+              <a:off x="3361664" y="4585928"/>
+              <a:ext cx="1274894" cy="364404"/>
             </a:xfrm>
             <a:prstGeom prst="roundRect">
               <a:avLst>
@@ -4436,16 +4439,41 @@
                 </a:lnSpc>
               </a:pPr>
               <a:r>
-                <a:rPr lang="en-US" altLang="zh-CN" sz="1050" dirty="0">
-                  <a:solidFill>
-                    <a:schemeClr val="bg1"/>
-                  </a:solidFill>
-                  <a:latin typeface="微软雅黑 Light" panose="020B0502040204020203" pitchFamily="34" charset="-122"/>
-                  <a:ea typeface="微软雅黑 Light" panose="020B0502040204020203" pitchFamily="34" charset="-122"/>
-                  <a:cs typeface="Arial" panose="020B0604020202020204" pitchFamily="34" charset="0"/>
-                </a:rPr>
-                <a:t>KEY WORD</a:t>
+                <a:rPr lang="en-US" altLang="zh-CN" sz="900" dirty="0"/>
+                <a:t>cv2.cvtColor</a:t>
               </a:r>
+              <a:r>
+                <a:rPr lang="zh-CN" altLang="en-US" sz="900" dirty="0"/>
+                <a:t>（</a:t>
+              </a:r>
+              <a:r>
+                <a:rPr lang="en-US" altLang="zh-CN" sz="900" dirty="0" err="1"/>
+                <a:t>img</a:t>
+              </a:r>
+              <a:r>
+                <a:rPr lang="en-US" altLang="zh-CN" sz="900" dirty="0"/>
+                <a:t>, cv2.COLOR_BGR2RGB</a:t>
+              </a:r>
+              <a:r>
+                <a:rPr lang="zh-CN" altLang="en-US" sz="900" dirty="0"/>
+                <a:t>）</a:t>
+              </a:r>
+              <a:endParaRPr lang="en-US" altLang="zh-CN" sz="900" dirty="0"/>
+            </a:p>
+            <a:p>
+              <a:pPr algn="ctr">
+                <a:lnSpc>
+                  <a:spcPct val="150000"/>
+                </a:lnSpc>
+              </a:pPr>
+              <a:endParaRPr lang="en-US" altLang="zh-CN" sz="900" dirty="0">
+                <a:solidFill>
+                  <a:schemeClr val="bg1"/>
+                </a:solidFill>
+                <a:latin typeface="微软雅黑 Light" panose="020B0502040204020203" pitchFamily="34" charset="-122"/>
+                <a:ea typeface="微软雅黑 Light" panose="020B0502040204020203" pitchFamily="34" charset="-122"/>
+                <a:cs typeface="Arial" panose="020B0604020202020204" pitchFamily="34" charset="0"/>
+              </a:endParaRPr>
             </a:p>
           </p:txBody>
         </p:sp>
@@ -7130,7 +7158,7 @@
           <p:spPr>
             <a:xfrm>
               <a:off x="5458790" y="2996456"/>
-              <a:ext cx="1661340" cy="589445"/>
+              <a:ext cx="1661340" cy="228678"/>
             </a:xfrm>
             <a:prstGeom prst="rect">
               <a:avLst/>
@@ -7158,7 +7186,33 @@
                   <a:latin typeface="微软雅黑 Light" panose="020B0502040204020203" pitchFamily="34" charset="-122"/>
                   <a:ea typeface="微软雅黑 Light" panose="020B0502040204020203" pitchFamily="34" charset="-122"/>
                 </a:rPr>
-                <a:t>点击文本框即可进行编辑输入相关内容点击文本框即可进行编辑输入相关内容</a:t>
+                <a:t>使用</a:t>
+              </a:r>
+              <a:r>
+                <a:rPr lang="en-US" altLang="zh-CN" sz="1050" dirty="0">
+                  <a:solidFill>
+                    <a:schemeClr val="tx1">
+                      <a:lumMod val="75000"/>
+                      <a:lumOff val="25000"/>
+                    </a:schemeClr>
+                  </a:solidFill>
+                  <a:latin typeface="微软雅黑 Light" panose="020B0502040204020203" pitchFamily="34" charset="-122"/>
+                  <a:ea typeface="微软雅黑 Light" panose="020B0502040204020203" pitchFamily="34" charset="-122"/>
+                </a:rPr>
+                <a:t>for</a:t>
+              </a:r>
+              <a:r>
+                <a:rPr lang="zh-CN" altLang="en-US" sz="1050" dirty="0">
+                  <a:solidFill>
+                    <a:schemeClr val="tx1">
+                      <a:lumMod val="75000"/>
+                      <a:lumOff val="25000"/>
+                    </a:schemeClr>
+                  </a:solidFill>
+                  <a:latin typeface="微软雅黑 Light" panose="020B0502040204020203" pitchFamily="34" charset="-122"/>
+                  <a:ea typeface="微软雅黑 Light" panose="020B0502040204020203" pitchFamily="34" charset="-122"/>
+                </a:rPr>
+                <a:t>循环遍历要调用的模型列表</a:t>
               </a:r>
             </a:p>
           </p:txBody>
@@ -7172,7 +7226,7 @@
           <p:spPr>
             <a:xfrm>
               <a:off x="5458790" y="2703117"/>
-              <a:ext cx="1105554" cy="312427"/>
+              <a:ext cx="1217982" cy="236265"/>
             </a:xfrm>
             <a:prstGeom prst="rect">
               <a:avLst/>
@@ -7190,7 +7244,7 @@
                 </a:lnSpc>
               </a:pPr>
               <a:r>
-                <a:rPr lang="zh-CN" altLang="en-US" sz="1600" b="1" dirty="0">
+                <a:rPr lang="zh-CN" altLang="en-US" sz="1100" b="1" dirty="0">
                   <a:solidFill>
                     <a:schemeClr val="tx1">
                       <a:lumMod val="75000"/>
@@ -7201,7 +7255,7 @@
                   <a:ea typeface="微软雅黑 Light" panose="020B0502040204020203" pitchFamily="34" charset="-122"/>
                   <a:cs typeface="Arial" panose="020B0604020202020204" pitchFamily="34" charset="0"/>
                 </a:rPr>
-                <a:t>添加标题</a:t>
+                <a:t>给后端发送调用的模型</a:t>
               </a:r>
             </a:p>
           </p:txBody>
@@ -7215,7 +7269,7 @@
           <p:spPr>
             <a:xfrm>
               <a:off x="8318785" y="2996456"/>
-              <a:ext cx="1661340" cy="589445"/>
+              <a:ext cx="1661340" cy="409061"/>
             </a:xfrm>
             <a:prstGeom prst="rect">
               <a:avLst/>
@@ -7243,7 +7297,7 @@
                   <a:latin typeface="微软雅黑 Light" panose="020B0502040204020203" pitchFamily="34" charset="-122"/>
                   <a:ea typeface="微软雅黑 Light" panose="020B0502040204020203" pitchFamily="34" charset="-122"/>
                 </a:rPr>
-                <a:t>点击文本框即可进行编辑输入相关内容点击文本框即可进行编辑输入相关内容</a:t>
+                <a:t>根据检测结果生成可视化的结果卡片</a:t>
               </a:r>
             </a:p>
           </p:txBody>
@@ -7257,7 +7311,7 @@
           <p:spPr>
             <a:xfrm>
               <a:off x="8318787" y="2703117"/>
-              <a:ext cx="1105554" cy="312427"/>
+              <a:ext cx="1105554" cy="236265"/>
             </a:xfrm>
             <a:prstGeom prst="rect">
               <a:avLst/>
@@ -7275,7 +7329,7 @@
                 </a:lnSpc>
               </a:pPr>
               <a:r>
-                <a:rPr lang="zh-CN" altLang="en-US" sz="1600" b="1" dirty="0">
+                <a:rPr lang="zh-CN" altLang="en-US" sz="1100" b="1" dirty="0">
                   <a:solidFill>
                     <a:schemeClr val="tx1">
                       <a:lumMod val="75000"/>
@@ -7286,7 +7340,7 @@
                   <a:ea typeface="微软雅黑 Light" panose="020B0502040204020203" pitchFamily="34" charset="-122"/>
                   <a:cs typeface="Arial" panose="020B0604020202020204" pitchFamily="34" charset="0"/>
                 </a:rPr>
-                <a:t>添加标题</a:t>
+                <a:t>返回结果给前端</a:t>
               </a:r>
             </a:p>
           </p:txBody>
@@ -7300,7 +7354,7 @@
           <p:spPr>
             <a:xfrm>
               <a:off x="7083262" y="4532448"/>
-              <a:ext cx="1661340" cy="589445"/>
+              <a:ext cx="1661340" cy="228678"/>
             </a:xfrm>
             <a:prstGeom prst="rect">
               <a:avLst/>
@@ -7317,19 +7371,16 @@
                   <a:spcPct val="150000"/>
                 </a:lnSpc>
               </a:pPr>
-              <a:r>
-                <a:rPr lang="zh-CN" altLang="en-US" sz="1050" dirty="0">
-                  <a:solidFill>
-                    <a:schemeClr val="tx1">
-                      <a:lumMod val="75000"/>
-                      <a:lumOff val="25000"/>
-                    </a:schemeClr>
-                  </a:solidFill>
-                  <a:latin typeface="微软雅黑 Light" panose="020B0502040204020203" pitchFamily="34" charset="-122"/>
-                  <a:ea typeface="微软雅黑 Light" panose="020B0502040204020203" pitchFamily="34" charset="-122"/>
-                </a:rPr>
-                <a:t>点击文本框即可进行编辑输入相关内容点击文本框即可进行编辑输入相关内容</a:t>
-              </a:r>
+              <a:endParaRPr lang="zh-CN" altLang="en-US" sz="1050" dirty="0">
+                <a:solidFill>
+                  <a:schemeClr val="tx1">
+                    <a:lumMod val="75000"/>
+                    <a:lumOff val="25000"/>
+                  </a:schemeClr>
+                </a:solidFill>
+                <a:latin typeface="微软雅黑 Light" panose="020B0502040204020203" pitchFamily="34" charset="-122"/>
+                <a:ea typeface="微软雅黑 Light" panose="020B0502040204020203" pitchFamily="34" charset="-122"/>
+              </a:endParaRPr>
             </a:p>
           </p:txBody>
         </p:sp>
@@ -7359,20 +7410,17 @@
                   <a:spcPct val="150000"/>
                 </a:lnSpc>
               </a:pPr>
-              <a:r>
-                <a:rPr lang="zh-CN" altLang="en-US" sz="1600" b="1" dirty="0">
-                  <a:solidFill>
-                    <a:schemeClr val="tx1">
-                      <a:lumMod val="75000"/>
-                      <a:lumOff val="25000"/>
-                    </a:schemeClr>
-                  </a:solidFill>
-                  <a:latin typeface="微软雅黑 Light" panose="020B0502040204020203" pitchFamily="34" charset="-122"/>
-                  <a:ea typeface="微软雅黑 Light" panose="020B0502040204020203" pitchFamily="34" charset="-122"/>
-                  <a:cs typeface="Arial" panose="020B0604020202020204" pitchFamily="34" charset="0"/>
-                </a:rPr>
-                <a:t>添加标题</a:t>
-              </a:r>
+              <a:endParaRPr lang="zh-CN" altLang="en-US" sz="1600" b="1" dirty="0">
+                <a:solidFill>
+                  <a:schemeClr val="tx1">
+                    <a:lumMod val="75000"/>
+                    <a:lumOff val="25000"/>
+                  </a:schemeClr>
+                </a:solidFill>
+                <a:latin typeface="微软雅黑 Light" panose="020B0502040204020203" pitchFamily="34" charset="-122"/>
+                <a:ea typeface="微软雅黑 Light" panose="020B0502040204020203" pitchFamily="34" charset="-122"/>
+                <a:cs typeface="Arial" panose="020B0604020202020204" pitchFamily="34" charset="0"/>
+              </a:endParaRPr>
             </a:p>
           </p:txBody>
         </p:sp>
@@ -7385,7 +7433,7 @@
           <p:spPr>
             <a:xfrm>
               <a:off x="4687842" y="4726230"/>
-              <a:ext cx="1661340" cy="589445"/>
+              <a:ext cx="1661340" cy="228678"/>
             </a:xfrm>
             <a:prstGeom prst="rect">
               <a:avLst/>
@@ -7413,7 +7461,33 @@
                   <a:latin typeface="微软雅黑 Light" panose="020B0502040204020203" pitchFamily="34" charset="-122"/>
                   <a:ea typeface="微软雅黑 Light" panose="020B0502040204020203" pitchFamily="34" charset="-122"/>
                 </a:rPr>
-                <a:t>点击文本框即可进行编辑输入相关内容点击文本框即可进行编辑输入相关内容</a:t>
+                <a:t>转换为</a:t>
+              </a:r>
+              <a:r>
+                <a:rPr lang="en-US" altLang="zh-CN" sz="1050" dirty="0">
+                  <a:solidFill>
+                    <a:schemeClr val="tx1">
+                      <a:lumMod val="75000"/>
+                      <a:lumOff val="25000"/>
+                    </a:schemeClr>
+                  </a:solidFill>
+                  <a:latin typeface="微软雅黑 Light" panose="020B0502040204020203" pitchFamily="34" charset="-122"/>
+                  <a:ea typeface="微软雅黑 Light" panose="020B0502040204020203" pitchFamily="34" charset="-122"/>
+                </a:rPr>
+                <a:t>RGB</a:t>
+              </a:r>
+              <a:r>
+                <a:rPr lang="zh-CN" altLang="en-US" sz="1050" dirty="0">
+                  <a:solidFill>
+                    <a:schemeClr val="tx1">
+                      <a:lumMod val="75000"/>
+                      <a:lumOff val="25000"/>
+                    </a:schemeClr>
+                  </a:solidFill>
+                  <a:latin typeface="微软雅黑 Light" panose="020B0502040204020203" pitchFamily="34" charset="-122"/>
+                  <a:ea typeface="微软雅黑 Light" panose="020B0502040204020203" pitchFamily="34" charset="-122"/>
+                </a:rPr>
+                <a:t>后识别</a:t>
               </a:r>
             </a:p>
           </p:txBody>
@@ -7444,20 +7518,17 @@
                   <a:spcPct val="150000"/>
                 </a:lnSpc>
               </a:pPr>
-              <a:r>
-                <a:rPr lang="zh-CN" altLang="en-US" sz="1600" b="1" dirty="0">
-                  <a:solidFill>
-                    <a:schemeClr val="tx1">
-                      <a:lumMod val="75000"/>
-                      <a:lumOff val="25000"/>
-                    </a:schemeClr>
-                  </a:solidFill>
-                  <a:latin typeface="微软雅黑 Light" panose="020B0502040204020203" pitchFamily="34" charset="-122"/>
-                  <a:ea typeface="微软雅黑 Light" panose="020B0502040204020203" pitchFamily="34" charset="-122"/>
-                  <a:cs typeface="Arial" panose="020B0604020202020204" pitchFamily="34" charset="0"/>
-                </a:rPr>
-                <a:t>添加标题</a:t>
-              </a:r>
+              <a:endParaRPr lang="zh-CN" altLang="en-US" sz="1600" b="1" dirty="0">
+                <a:solidFill>
+                  <a:schemeClr val="tx1">
+                    <a:lumMod val="75000"/>
+                    <a:lumOff val="25000"/>
+                  </a:schemeClr>
+                </a:solidFill>
+                <a:latin typeface="微软雅黑 Light" panose="020B0502040204020203" pitchFamily="34" charset="-122"/>
+                <a:ea typeface="微软雅黑 Light" panose="020B0502040204020203" pitchFamily="34" charset="-122"/>
+                <a:cs typeface="Arial" panose="020B0604020202020204" pitchFamily="34" charset="0"/>
+              </a:endParaRPr>
             </a:p>
           </p:txBody>
         </p:sp>
@@ -7498,7 +7569,37 @@
                   <a:latin typeface="微软雅黑 Light" panose="020B0502040204020203" pitchFamily="34" charset="-122"/>
                   <a:ea typeface="微软雅黑 Light" panose="020B0502040204020203" pitchFamily="34" charset="-122"/>
                 </a:rPr>
-                <a:t>点击文本框即可进行编辑输入相关内容点击文本框即可进行编辑输入相关内容</a:t>
+                <a:t>在上传页面底下提供六个按钮，可以单选或者多选模型</a:t>
+              </a:r>
+              <a:endParaRPr lang="en-US" altLang="zh-CN" sz="1050" dirty="0">
+                <a:solidFill>
+                  <a:schemeClr val="tx1">
+                    <a:lumMod val="75000"/>
+                    <a:lumOff val="25000"/>
+                  </a:schemeClr>
+                </a:solidFill>
+                <a:latin typeface="微软雅黑 Light" panose="020B0502040204020203" pitchFamily="34" charset="-122"/>
+                <a:ea typeface="微软雅黑 Light" panose="020B0502040204020203" pitchFamily="34" charset="-122"/>
+              </a:endParaRPr>
+            </a:p>
+            <a:p>
+              <a:pPr>
+                <a:lnSpc>
+                  <a:spcPct val="150000"/>
+                </a:lnSpc>
+              </a:pPr>
+              <a:r>
+                <a:rPr lang="zh-CN" altLang="en-US" sz="1050" dirty="0">
+                  <a:solidFill>
+                    <a:schemeClr val="tx1">
+                      <a:lumMod val="75000"/>
+                      <a:lumOff val="25000"/>
+                    </a:schemeClr>
+                  </a:solidFill>
+                  <a:latin typeface="微软雅黑 Light" panose="020B0502040204020203" pitchFamily="34" charset="-122"/>
+                  <a:ea typeface="微软雅黑 Light" panose="020B0502040204020203" pitchFamily="34" charset="-122"/>
+                </a:rPr>
+                <a:t>在列表中保存用户要调用的模型</a:t>
               </a:r>
             </a:p>
           </p:txBody>
@@ -7512,7 +7613,7 @@
           <p:spPr>
             <a:xfrm>
               <a:off x="2528293" y="2703117"/>
-              <a:ext cx="1105554" cy="312427"/>
+              <a:ext cx="1105554" cy="236265"/>
             </a:xfrm>
             <a:prstGeom prst="rect">
               <a:avLst/>
@@ -7530,7 +7631,7 @@
                 </a:lnSpc>
               </a:pPr>
               <a:r>
-                <a:rPr lang="zh-CN" altLang="en-US" sz="1600" b="1" dirty="0">
+                <a:rPr lang="zh-CN" altLang="en-US" sz="1100" b="1" dirty="0">
                   <a:solidFill>
                     <a:schemeClr val="tx1">
                       <a:lumMod val="75000"/>
@@ -7541,7 +7642,7 @@
                   <a:ea typeface="微软雅黑 Light" panose="020B0502040204020203" pitchFamily="34" charset="-122"/>
                   <a:cs typeface="Arial" panose="020B0604020202020204" pitchFamily="34" charset="0"/>
                 </a:rPr>
-                <a:t>添加标题</a:t>
+                <a:t>前端提供筛选模块</a:t>
               </a:r>
             </a:p>
           </p:txBody>
@@ -7657,6 +7758,554 @@
 </file>
 
 <file path=ppt/slides/slide11.xml><?xml version="1.0" encoding="utf-8"?>
+<p:sld xmlns:a="http://schemas.openxmlformats.org/drawingml/2006/main" xmlns:r="http://schemas.openxmlformats.org/officeDocument/2006/relationships" xmlns:p="http://schemas.openxmlformats.org/presentationml/2006/main">
+  <p:cSld>
+    <p:spTree>
+      <p:nvGrpSpPr>
+        <p:cNvPr id="1" name=""/>
+        <p:cNvGrpSpPr/>
+        <p:nvPr/>
+      </p:nvGrpSpPr>
+      <p:grpSpPr>
+        <a:xfrm>
+          <a:off x="0" y="0"/>
+          <a:ext cx="0" cy="0"/>
+          <a:chOff x="0" y="0"/>
+          <a:chExt cx="0" cy="0"/>
+        </a:xfrm>
+      </p:grpSpPr>
+      <p:pic>
+        <p:nvPicPr>
+          <p:cNvPr id="3" name="图片 2">
+            <a:extLst>
+              <a:ext uri="{FF2B5EF4-FFF2-40B4-BE49-F238E27FC236}">
+                <a16:creationId xmlns:a16="http://schemas.microsoft.com/office/drawing/2014/main" id="{0E71F8C3-E262-D5D8-364D-1DEB796100D3}"/>
+              </a:ext>
+            </a:extLst>
+          </p:cNvPr>
+          <p:cNvPicPr>
+            <a:picLocks/>
+          </p:cNvPicPr>
+          <p:nvPr/>
+        </p:nvPicPr>
+        <p:blipFill>
+          <a:blip r:embed="rId2"/>
+          <a:srcRect r="29843"/>
+          <a:stretch>
+            <a:fillRect/>
+          </a:stretch>
+        </p:blipFill>
+        <p:spPr>
+          <a:xfrm>
+            <a:off x="7153453" y="69969"/>
+            <a:ext cx="3534867" cy="3359031"/>
+          </a:xfrm>
+          <a:prstGeom prst="rect">
+            <a:avLst/>
+          </a:prstGeom>
+        </p:spPr>
+      </p:pic>
+      <p:pic>
+        <p:nvPicPr>
+          <p:cNvPr id="5" name="图片 4">
+            <a:extLst>
+              <a:ext uri="{FF2B5EF4-FFF2-40B4-BE49-F238E27FC236}">
+                <a16:creationId xmlns:a16="http://schemas.microsoft.com/office/drawing/2014/main" id="{FB71CFF7-320B-803C-C433-07ED080B75C9}"/>
+              </a:ext>
+            </a:extLst>
+          </p:cNvPr>
+          <p:cNvPicPr>
+            <a:picLocks noChangeAspect="1"/>
+          </p:cNvPicPr>
+          <p:nvPr/>
+        </p:nvPicPr>
+        <p:blipFill>
+          <a:blip r:embed="rId3"/>
+          <a:stretch>
+            <a:fillRect/>
+          </a:stretch>
+        </p:blipFill>
+        <p:spPr>
+          <a:xfrm>
+            <a:off x="5781040" y="3540377"/>
+            <a:ext cx="6410960" cy="3205480"/>
+          </a:xfrm>
+          <a:prstGeom prst="rect">
+            <a:avLst/>
+          </a:prstGeom>
+        </p:spPr>
+      </p:pic>
+      <p:pic>
+        <p:nvPicPr>
+          <p:cNvPr id="7" name="图片 6">
+            <a:extLst>
+              <a:ext uri="{FF2B5EF4-FFF2-40B4-BE49-F238E27FC236}">
+                <a16:creationId xmlns:a16="http://schemas.microsoft.com/office/drawing/2014/main" id="{B1EEC6C5-2A79-953E-C815-3752DF02BB5C}"/>
+              </a:ext>
+            </a:extLst>
+          </p:cNvPr>
+          <p:cNvPicPr>
+            <a:picLocks/>
+          </p:cNvPicPr>
+          <p:nvPr/>
+        </p:nvPicPr>
+        <p:blipFill>
+          <a:blip r:embed="rId4"/>
+          <a:srcRect l="9543" t="8247" r="10243" b="15472"/>
+          <a:stretch>
+            <a:fillRect/>
+          </a:stretch>
+        </p:blipFill>
+        <p:spPr>
+          <a:xfrm>
+            <a:off x="0" y="1"/>
+            <a:ext cx="6614160" cy="3540376"/>
+          </a:xfrm>
+          <a:prstGeom prst="rect">
+            <a:avLst/>
+          </a:prstGeom>
+        </p:spPr>
+      </p:pic>
+    </p:spTree>
+    <p:extLst>
+      <p:ext uri="{BB962C8B-B14F-4D97-AF65-F5344CB8AC3E}">
+        <p14:creationId xmlns:p14="http://schemas.microsoft.com/office/powerpoint/2010/main" val="3119327697"/>
+      </p:ext>
+    </p:extLst>
+  </p:cSld>
+  <p:clrMapOvr>
+    <a:masterClrMapping/>
+  </p:clrMapOvr>
+</p:sld>
+</file>
+
+<file path=ppt/slides/slide12.xml><?xml version="1.0" encoding="utf-8"?>
+<p:sld xmlns:a="http://schemas.openxmlformats.org/drawingml/2006/main" xmlns:r="http://schemas.openxmlformats.org/officeDocument/2006/relationships" xmlns:p="http://schemas.openxmlformats.org/presentationml/2006/main">
+  <p:cSld>
+    <p:spTree>
+      <p:nvGrpSpPr>
+        <p:cNvPr id="1" name=""/>
+        <p:cNvGrpSpPr/>
+        <p:nvPr/>
+      </p:nvGrpSpPr>
+      <p:grpSpPr>
+        <a:xfrm>
+          <a:off x="0" y="0"/>
+          <a:ext cx="0" cy="0"/>
+          <a:chOff x="0" y="0"/>
+          <a:chExt cx="0" cy="0"/>
+        </a:xfrm>
+      </p:grpSpPr>
+      <p:sp>
+        <p:nvSpPr>
+          <p:cNvPr id="4" name="标题 3">
+            <a:extLst>
+              <a:ext uri="{FF2B5EF4-FFF2-40B4-BE49-F238E27FC236}">
+                <a16:creationId xmlns:a16="http://schemas.microsoft.com/office/drawing/2014/main" id="{EFD87911-4036-6DFA-D8DE-C403760E43FC}"/>
+              </a:ext>
+            </a:extLst>
+          </p:cNvPr>
+          <p:cNvSpPr>
+            <a:spLocks noGrp="1"/>
+          </p:cNvSpPr>
+          <p:nvPr>
+            <p:ph type="title"/>
+          </p:nvPr>
+        </p:nvSpPr>
+        <p:spPr/>
+        <p:txBody>
+          <a:bodyPr>
+            <a:normAutofit/>
+          </a:bodyPr>
+          <a:lstStyle/>
+          <a:p>
+            <a:r>
+              <a:rPr lang="zh-CN" altLang="en-US" sz="2800" dirty="0"/>
+              <a:t>“上传”页面底下按钮</a:t>
+            </a:r>
+            <a:r>
+              <a:rPr lang="en-US" altLang="zh-CN" sz="2800" dirty="0"/>
+              <a:t>UI</a:t>
+            </a:r>
+            <a:r>
+              <a:rPr lang="zh-CN" altLang="en-US" sz="2800" dirty="0"/>
+              <a:t>设计</a:t>
+            </a:r>
+          </a:p>
+        </p:txBody>
+      </p:sp>
+      <p:pic>
+        <p:nvPicPr>
+          <p:cNvPr id="9" name="内容占位符 8">
+            <a:extLst>
+              <a:ext uri="{FF2B5EF4-FFF2-40B4-BE49-F238E27FC236}">
+                <a16:creationId xmlns:a16="http://schemas.microsoft.com/office/drawing/2014/main" id="{CEFAF615-CCFD-1249-C618-296744A4024A}"/>
+              </a:ext>
+            </a:extLst>
+          </p:cNvPr>
+          <p:cNvPicPr>
+            <a:picLocks noGrp="1" noChangeAspect="1"/>
+          </p:cNvPicPr>
+          <p:nvPr>
+            <p:ph idx="1"/>
+          </p:nvPr>
+        </p:nvPicPr>
+        <p:blipFill>
+          <a:blip r:embed="rId2"/>
+          <a:stretch>
+            <a:fillRect/>
+          </a:stretch>
+        </p:blipFill>
+        <p:spPr>
+          <a:xfrm>
+            <a:off x="757770" y="1690689"/>
+            <a:ext cx="6238253" cy="3756594"/>
+          </a:xfrm>
+          <a:prstGeom prst="rect">
+            <a:avLst/>
+          </a:prstGeom>
+        </p:spPr>
+      </p:pic>
+      <p:sp>
+        <p:nvSpPr>
+          <p:cNvPr id="11" name="文本框 10">
+            <a:extLst>
+              <a:ext uri="{FF2B5EF4-FFF2-40B4-BE49-F238E27FC236}">
+                <a16:creationId xmlns:a16="http://schemas.microsoft.com/office/drawing/2014/main" id="{B445C113-7226-C132-FD02-2A7160593575}"/>
+              </a:ext>
+            </a:extLst>
+          </p:cNvPr>
+          <p:cNvSpPr txBox="1"/>
+          <p:nvPr/>
+        </p:nvSpPr>
+        <p:spPr>
+          <a:xfrm>
+            <a:off x="5721469" y="490359"/>
+            <a:ext cx="6094562" cy="1200329"/>
+          </a:xfrm>
+          <a:prstGeom prst="rect">
+            <a:avLst/>
+          </a:prstGeom>
+          <a:noFill/>
+        </p:spPr>
+        <p:txBody>
+          <a:bodyPr wrap="square">
+            <a:spAutoFit/>
+          </a:bodyPr>
+          <a:lstStyle/>
+          <a:p>
+            <a:r>
+              <a:rPr lang="zh-CN" altLang="en-US" dirty="0"/>
+              <a:t>data-model：存储 YOLO 模型类型，用于后端识别</a:t>
+            </a:r>
+          </a:p>
+          <a:p>
+            <a:r>
+              <a:rPr lang="zh-CN" altLang="en-US" dirty="0"/>
+              <a:t>onclick：调用 JavaScript 的 toggleModelSelection() 函数切换选中状态</a:t>
+            </a:r>
+          </a:p>
+          <a:p>
+            <a:r>
+              <a:rPr lang="zh-CN" altLang="en-US" dirty="0"/>
+              <a:t>style：提供交互反馈（手型光标、平滑过渡、透明边框）</a:t>
+            </a:r>
+          </a:p>
+        </p:txBody>
+      </p:sp>
+    </p:spTree>
+    <p:extLst>
+      <p:ext uri="{BB962C8B-B14F-4D97-AF65-F5344CB8AC3E}">
+        <p14:creationId xmlns:p14="http://schemas.microsoft.com/office/powerpoint/2010/main" val="4192027051"/>
+      </p:ext>
+    </p:extLst>
+  </p:cSld>
+  <p:clrMapOvr>
+    <a:masterClrMapping/>
+  </p:clrMapOvr>
+</p:sld>
+</file>
+
+<file path=ppt/slides/slide13.xml><?xml version="1.0" encoding="utf-8"?>
+<p:sld xmlns:a="http://schemas.openxmlformats.org/drawingml/2006/main" xmlns:r="http://schemas.openxmlformats.org/officeDocument/2006/relationships" xmlns:p="http://schemas.openxmlformats.org/presentationml/2006/main">
+  <p:cSld>
+    <p:spTree>
+      <p:nvGrpSpPr>
+        <p:cNvPr id="1" name=""/>
+        <p:cNvGrpSpPr/>
+        <p:nvPr/>
+      </p:nvGrpSpPr>
+      <p:grpSpPr>
+        <a:xfrm>
+          <a:off x="0" y="0"/>
+          <a:ext cx="0" cy="0"/>
+          <a:chOff x="0" y="0"/>
+          <a:chExt cx="0" cy="0"/>
+        </a:xfrm>
+      </p:grpSpPr>
+      <p:sp>
+        <p:nvSpPr>
+          <p:cNvPr id="2" name="标题 1">
+            <a:extLst>
+              <a:ext uri="{FF2B5EF4-FFF2-40B4-BE49-F238E27FC236}">
+                <a16:creationId xmlns:a16="http://schemas.microsoft.com/office/drawing/2014/main" id="{C81307ED-4056-C8EE-0A2E-B8B1F2DBB09F}"/>
+              </a:ext>
+            </a:extLst>
+          </p:cNvPr>
+          <p:cNvSpPr>
+            <a:spLocks noGrp="1"/>
+          </p:cNvSpPr>
+          <p:nvPr>
+            <p:ph type="title"/>
+          </p:nvPr>
+        </p:nvSpPr>
+        <p:spPr>
+          <a:xfrm>
+            <a:off x="122207" y="278861"/>
+            <a:ext cx="10515600" cy="1325563"/>
+          </a:xfrm>
+        </p:spPr>
+        <p:txBody>
+          <a:bodyPr/>
+          <a:lstStyle/>
+          <a:p>
+            <a:r>
+              <a:rPr lang="en-US" altLang="zh-CN" dirty="0"/>
+              <a:t>service</a:t>
+            </a:r>
+            <a:r>
+              <a:rPr lang="zh-CN" altLang="en-US" dirty="0"/>
+              <a:t>类</a:t>
+            </a:r>
+          </a:p>
+        </p:txBody>
+      </p:sp>
+      <p:pic>
+        <p:nvPicPr>
+          <p:cNvPr id="5" name="内容占位符 4">
+            <a:extLst>
+              <a:ext uri="{FF2B5EF4-FFF2-40B4-BE49-F238E27FC236}">
+                <a16:creationId xmlns:a16="http://schemas.microsoft.com/office/drawing/2014/main" id="{7921DCA3-6EB4-191C-25FE-30CCC76F220A}"/>
+              </a:ext>
+            </a:extLst>
+          </p:cNvPr>
+          <p:cNvPicPr>
+            <a:picLocks noGrp="1" noChangeAspect="1"/>
+          </p:cNvPicPr>
+          <p:nvPr>
+            <p:ph idx="1"/>
+          </p:nvPr>
+        </p:nvPicPr>
+        <p:blipFill>
+          <a:blip r:embed="rId2"/>
+          <a:stretch>
+            <a:fillRect/>
+          </a:stretch>
+        </p:blipFill>
+        <p:spPr>
+          <a:xfrm>
+            <a:off x="188484" y="1690688"/>
+            <a:ext cx="5677478" cy="1942811"/>
+          </a:xfrm>
+          <a:prstGeom prst="rect">
+            <a:avLst/>
+          </a:prstGeom>
+        </p:spPr>
+      </p:pic>
+      <p:sp>
+        <p:nvSpPr>
+          <p:cNvPr id="7" name="文本框 6">
+            <a:extLst>
+              <a:ext uri="{FF2B5EF4-FFF2-40B4-BE49-F238E27FC236}">
+                <a16:creationId xmlns:a16="http://schemas.microsoft.com/office/drawing/2014/main" id="{03229570-E66C-17F1-9E8B-119602060CA5}"/>
+              </a:ext>
+            </a:extLst>
+          </p:cNvPr>
+          <p:cNvSpPr txBox="1"/>
+          <p:nvPr/>
+        </p:nvSpPr>
+        <p:spPr>
+          <a:xfrm>
+            <a:off x="5988889" y="1692597"/>
+            <a:ext cx="6094562" cy="646331"/>
+          </a:xfrm>
+          <a:prstGeom prst="rect">
+            <a:avLst/>
+          </a:prstGeom>
+          <a:noFill/>
+        </p:spPr>
+        <p:txBody>
+          <a:bodyPr wrap="square">
+            <a:spAutoFit/>
+          </a:bodyPr>
+          <a:lstStyle/>
+          <a:p>
+            <a:pPr>
+              <a:buNone/>
+            </a:pPr>
+            <a:r>
+              <a:rPr lang="en-US" altLang="zh-CN" sz="1800" dirty="0" err="1">
+                <a:effectLst/>
+                <a:latin typeface="JetBrains Mono"/>
+              </a:rPr>
+              <a:t>selected_models</a:t>
+            </a:r>
+            <a:r>
+              <a:rPr lang="en-US" altLang="zh-CN" sz="1800" dirty="0">
+                <a:effectLst/>
+                <a:latin typeface="JetBrains Mono"/>
+              </a:rPr>
+              <a:t>: </a:t>
+            </a:r>
+            <a:r>
+              <a:rPr lang="zh-CN" altLang="en-US" sz="1800" dirty="0">
+                <a:effectLst/>
+                <a:latin typeface="宋体" panose="02010600030101010101" pitchFamily="2" charset="-122"/>
+                <a:ea typeface="宋体" panose="02010600030101010101" pitchFamily="2" charset="-122"/>
+              </a:rPr>
+              <a:t>选择的模型列表，如</a:t>
+            </a:r>
+            <a:r>
+              <a:rPr lang="zh-CN" altLang="en-US" sz="1800" dirty="0">
+                <a:effectLst/>
+                <a:latin typeface="JetBrains Mono"/>
+              </a:rPr>
+              <a:t> </a:t>
+            </a:r>
+            <a:r>
+              <a:rPr lang="en-US" altLang="zh-CN" sz="1800" dirty="0">
+                <a:effectLst/>
+                <a:latin typeface="JetBrains Mono"/>
+              </a:rPr>
+              <a:t>[‘laptop’, ‘keyboard’]</a:t>
+            </a:r>
+            <a:r>
+              <a:rPr lang="zh-CN" altLang="en-US" sz="1800" dirty="0">
+                <a:effectLst/>
+                <a:latin typeface="宋体" panose="02010600030101010101" pitchFamily="2" charset="-122"/>
+                <a:ea typeface="宋体" panose="02010600030101010101" pitchFamily="2" charset="-122"/>
+              </a:rPr>
+              <a:t>，</a:t>
+            </a:r>
+            <a:r>
+              <a:rPr lang="en-US" altLang="zh-CN" sz="1800" dirty="0">
+                <a:effectLst/>
+                <a:latin typeface="JetBrains Mono"/>
+              </a:rPr>
+              <a:t>None </a:t>
+            </a:r>
+            <a:r>
+              <a:rPr lang="zh-CN" altLang="en-US" sz="1800" dirty="0">
+                <a:effectLst/>
+                <a:latin typeface="宋体" panose="02010600030101010101" pitchFamily="2" charset="-122"/>
+                <a:ea typeface="宋体" panose="02010600030101010101" pitchFamily="2" charset="-122"/>
+              </a:rPr>
+              <a:t>表示使用所有模型，实现多选或者单选模型调用</a:t>
+            </a:r>
+            <a:endParaRPr lang="zh-CN" altLang="en-US" sz="1800" dirty="0">
+              <a:effectLst/>
+              <a:latin typeface="JetBrains Mono"/>
+            </a:endParaRPr>
+          </a:p>
+        </p:txBody>
+      </p:sp>
+      <p:pic>
+        <p:nvPicPr>
+          <p:cNvPr id="9" name="图片 8">
+            <a:extLst>
+              <a:ext uri="{FF2B5EF4-FFF2-40B4-BE49-F238E27FC236}">
+                <a16:creationId xmlns:a16="http://schemas.microsoft.com/office/drawing/2014/main" id="{F0744F9E-D6A2-9A9F-DE47-3DBF86B74257}"/>
+              </a:ext>
+            </a:extLst>
+          </p:cNvPr>
+          <p:cNvPicPr>
+            <a:picLocks noChangeAspect="1"/>
+          </p:cNvPicPr>
+          <p:nvPr/>
+        </p:nvPicPr>
+        <p:blipFill>
+          <a:blip r:embed="rId3"/>
+          <a:stretch>
+            <a:fillRect/>
+          </a:stretch>
+        </p:blipFill>
+        <p:spPr>
+          <a:xfrm>
+            <a:off x="188484" y="3946137"/>
+            <a:ext cx="6043184" cy="2019475"/>
+          </a:xfrm>
+          <a:prstGeom prst="rect">
+            <a:avLst/>
+          </a:prstGeom>
+        </p:spPr>
+      </p:pic>
+      <p:sp>
+        <p:nvSpPr>
+          <p:cNvPr id="11" name="文本框 10">
+            <a:extLst>
+              <a:ext uri="{FF2B5EF4-FFF2-40B4-BE49-F238E27FC236}">
+                <a16:creationId xmlns:a16="http://schemas.microsoft.com/office/drawing/2014/main" id="{48432BE3-76BD-E827-8CE1-2DAF5DD082D1}"/>
+              </a:ext>
+            </a:extLst>
+          </p:cNvPr>
+          <p:cNvSpPr txBox="1"/>
+          <p:nvPr/>
+        </p:nvSpPr>
+        <p:spPr>
+          <a:xfrm>
+            <a:off x="6478438" y="4081095"/>
+            <a:ext cx="4960189" cy="369332"/>
+          </a:xfrm>
+          <a:prstGeom prst="rect">
+            <a:avLst/>
+          </a:prstGeom>
+          <a:noFill/>
+        </p:spPr>
+        <p:txBody>
+          <a:bodyPr wrap="square">
+            <a:spAutoFit/>
+          </a:bodyPr>
+          <a:lstStyle/>
+          <a:p>
+            <a:pPr>
+              <a:buNone/>
+            </a:pPr>
+            <a:r>
+              <a:rPr lang="zh-CN" altLang="en-US" sz="1800" dirty="0">
+                <a:effectLst/>
+                <a:latin typeface="宋体" panose="02010600030101010101" pitchFamily="2" charset="-122"/>
+                <a:ea typeface="宋体" panose="02010600030101010101" pitchFamily="2" charset="-122"/>
+              </a:rPr>
+              <a:t>执行检测</a:t>
+            </a:r>
+            <a:r>
+              <a:rPr lang="zh-CN" altLang="en-US" dirty="0">
+                <a:latin typeface="宋体" panose="02010600030101010101" pitchFamily="2" charset="-122"/>
+                <a:ea typeface="宋体" panose="02010600030101010101" pitchFamily="2" charset="-122"/>
+              </a:rPr>
+              <a:t>：调用已训练好的模型</a:t>
+            </a:r>
+            <a:endParaRPr lang="zh-CN" altLang="en-US" sz="1800" dirty="0">
+              <a:effectLst/>
+              <a:latin typeface="JetBrains Mono"/>
+            </a:endParaRPr>
+          </a:p>
+        </p:txBody>
+      </p:sp>
+    </p:spTree>
+    <p:extLst>
+      <p:ext uri="{BB962C8B-B14F-4D97-AF65-F5344CB8AC3E}">
+        <p14:creationId xmlns:p14="http://schemas.microsoft.com/office/powerpoint/2010/main" val="2491519073"/>
+      </p:ext>
+    </p:extLst>
+  </p:cSld>
+  <p:clrMapOvr>
+    <a:masterClrMapping/>
+  </p:clrMapOvr>
+</p:sld>
+</file>
+
+<file path=ppt/slides/slide14.xml><?xml version="1.0" encoding="utf-8"?>
 <p:sld xmlns:a="http://schemas.openxmlformats.org/drawingml/2006/main" xmlns:r="http://schemas.openxmlformats.org/officeDocument/2006/relationships" xmlns:p="http://schemas.openxmlformats.org/presentationml/2006/main">
   <p:cSld>
     <p:spTree>
@@ -8527,7 +9176,7 @@
 </p:sld>
 </file>
 
-<file path=ppt/slides/slide12.xml><?xml version="1.0" encoding="utf-8"?>
+<file path=ppt/slides/slide15.xml><?xml version="1.0" encoding="utf-8"?>
 <p:sld xmlns:a="http://schemas.openxmlformats.org/drawingml/2006/main" xmlns:r="http://schemas.openxmlformats.org/officeDocument/2006/relationships" xmlns:p="http://schemas.openxmlformats.org/presentationml/2006/main">
   <p:cSld>
     <p:spTree>
@@ -11885,7 +12534,7 @@
 </p:sld>
 </file>
 
-<file path=ppt/slides/slide13.xml><?xml version="1.0" encoding="utf-8"?>
+<file path=ppt/slides/slide16.xml><?xml version="1.0" encoding="utf-8"?>
 <p:sld xmlns:a="http://schemas.openxmlformats.org/drawingml/2006/main" xmlns:r="http://schemas.openxmlformats.org/officeDocument/2006/relationships" xmlns:p="http://schemas.openxmlformats.org/presentationml/2006/main">
   <p:cSld>
     <p:spTree>
@@ -15242,7 +15891,7 @@
 </p:sld>
 </file>
 
-<file path=ppt/slides/slide14.xml><?xml version="1.0" encoding="utf-8"?>
+<file path=ppt/slides/slide17.xml><?xml version="1.0" encoding="utf-8"?>
 <p:sld xmlns:a="http://schemas.openxmlformats.org/drawingml/2006/main" xmlns:r="http://schemas.openxmlformats.org/officeDocument/2006/relationships" xmlns:p="http://schemas.openxmlformats.org/presentationml/2006/main">
   <p:cSld>
     <p:spTree>
@@ -25907,7 +26556,7 @@
         <p:spPr>
           <a:xfrm>
             <a:off x="5189500" y="2397468"/>
-            <a:ext cx="3406381" cy="706756"/>
+            <a:ext cx="3406381" cy="1323439"/>
           </a:xfrm>
           <a:prstGeom prst="rect">
             <a:avLst/>
@@ -25932,7 +26581,7 @@
                 <a:latin typeface="微软雅黑" panose="020B0503020204020204" pitchFamily="34" charset="-122"/>
                 <a:ea typeface="微软雅黑" panose="020B0503020204020204" pitchFamily="34" charset="-122"/>
               </a:rPr>
-              <a:t>模块设计</a:t>
+              <a:t>前端模型筛选模块</a:t>
             </a:r>
           </a:p>
         </p:txBody>
@@ -28181,7 +28830,7 @@
         <p:spPr>
           <a:xfrm>
             <a:off x="8178219" y="1697467"/>
-            <a:ext cx="2805256" cy="321945"/>
+            <a:ext cx="2805256" cy="303288"/>
           </a:xfrm>
           <a:prstGeom prst="rect">
             <a:avLst/>
@@ -28210,7 +28859,7 @@
                 <a:latin typeface="微软雅黑 Light" panose="020B0502040204020203" pitchFamily="34" charset="-122"/>
                 <a:ea typeface="微软雅黑 Light" panose="020B0502040204020203" pitchFamily="34" charset="-122"/>
               </a:rPr>
-              <a:t>点击文本框即可进行编辑输入相关内容</a:t>
+              <a:t>组员：杨启昕</a:t>
             </a:r>
           </a:p>
         </p:txBody>
@@ -28292,7 +28941,7 @@
         <p:spPr>
           <a:xfrm>
             <a:off x="8178219" y="2217312"/>
-            <a:ext cx="2805256" cy="321945"/>
+            <a:ext cx="2805256" cy="303288"/>
           </a:xfrm>
           <a:prstGeom prst="rect">
             <a:avLst/>
@@ -28321,7 +28970,7 @@
                 <a:latin typeface="微软雅黑 Light" panose="020B0502040204020203" pitchFamily="34" charset="-122"/>
                 <a:ea typeface="微软雅黑 Light" panose="020B0502040204020203" pitchFamily="34" charset="-122"/>
               </a:rPr>
-              <a:t>点击文本框即可进行编辑输入相关内容</a:t>
+              <a:t>负责内容：</a:t>
             </a:r>
           </a:p>
         </p:txBody>
@@ -28403,7 +29052,7 @@
         <p:spPr>
           <a:xfrm>
             <a:off x="8178219" y="2737157"/>
-            <a:ext cx="2805256" cy="321945"/>
+            <a:ext cx="2805256" cy="303288"/>
           </a:xfrm>
           <a:prstGeom prst="rect">
             <a:avLst/>
@@ -28432,7 +29081,7 @@
                 <a:latin typeface="微软雅黑 Light" panose="020B0502040204020203" pitchFamily="34" charset="-122"/>
                 <a:ea typeface="微软雅黑 Light" panose="020B0502040204020203" pitchFamily="34" charset="-122"/>
               </a:rPr>
-              <a:t>点击文本框即可进行编辑输入相关内容</a:t>
+              <a:t>笔记本电脑检测模型的训练</a:t>
             </a:r>
           </a:p>
         </p:txBody>
@@ -28514,7 +29163,7 @@
         <p:spPr>
           <a:xfrm>
             <a:off x="8178219" y="3257002"/>
-            <a:ext cx="2805256" cy="321945"/>
+            <a:ext cx="2805256" cy="303288"/>
           </a:xfrm>
           <a:prstGeom prst="rect">
             <a:avLst/>
@@ -28543,7 +29192,7 @@
                 <a:latin typeface="微软雅黑 Light" panose="020B0502040204020203" pitchFamily="34" charset="-122"/>
                 <a:ea typeface="微软雅黑 Light" panose="020B0502040204020203" pitchFamily="34" charset="-122"/>
               </a:rPr>
-              <a:t>点击文本框即可进行编辑输入相关内容</a:t>
+              <a:t>前端筛选调用单模型或多模型</a:t>
             </a:r>
           </a:p>
         </p:txBody>
@@ -28625,7 +29274,7 @@
         <p:spPr>
           <a:xfrm>
             <a:off x="8178219" y="3776847"/>
-            <a:ext cx="2805256" cy="321945"/>
+            <a:ext cx="2805256" cy="303288"/>
           </a:xfrm>
           <a:prstGeom prst="rect">
             <a:avLst/>
@@ -28654,7 +29303,7 @@
                 <a:latin typeface="微软雅黑 Light" panose="020B0502040204020203" pitchFamily="34" charset="-122"/>
                 <a:ea typeface="微软雅黑 Light" panose="020B0502040204020203" pitchFamily="34" charset="-122"/>
               </a:rPr>
-              <a:t>点击文本框即可进行编辑输入相关内容</a:t>
+              <a:t>后端实现多模型检测</a:t>
             </a:r>
           </a:p>
         </p:txBody>
